--- a/IT002-OOP/Slide lý thuyết/Others.pptx
+++ b/IT002-OOP/Slide lý thuyết/Others.pptx
@@ -5,7 +5,7 @@
     <p:sldMasterId id="2147483648" r:id="rId1"/>
   </p:sldMasterIdLst>
   <p:notesMasterIdLst>
-    <p:notesMasterId r:id="rId10"/>
+    <p:notesMasterId r:id="rId12"/>
   </p:notesMasterIdLst>
   <p:sldIdLst>
     <p:sldId id="256" r:id="rId2"/>
@@ -16,6 +16,8 @@
     <p:sldId id="1043" r:id="rId7"/>
     <p:sldId id="1044" r:id="rId8"/>
     <p:sldId id="1045" r:id="rId9"/>
+    <p:sldId id="1046" r:id="rId10"/>
+    <p:sldId id="1047" r:id="rId11"/>
   </p:sldIdLst>
   <p:sldSz cx="12192000" cy="6858000"/>
   <p:notesSz cx="6858000" cy="9144000"/>
@@ -203,7 +205,7 @@
           </a:lstStyle>
           <a:p>
             <a:fld id="{77F5E20D-330D-AE4A-A6A6-1850AD2ED2D6}" type="datetimeFigureOut">
-              <a:t>27/12/25</a:t>
+              <a:t>19/5/26</a:t>
             </a:fld>
             <a:endParaRPr lang="en-VN"/>
           </a:p>
@@ -618,7 +620,7 @@
           <a:lstStyle/>
           <a:p>
             <a:fld id="{B19CC23C-BA29-DE42-B018-0A671B23AB5C}" type="datetime1">
-              <a:t>27/12/25</a:t>
+              <a:t>19/5/26</a:t>
             </a:fld>
             <a:endParaRPr lang="en-VN"/>
           </a:p>
@@ -816,7 +818,7 @@
           <a:lstStyle/>
           <a:p>
             <a:fld id="{4C98E9E1-1963-2549-A392-0CE442C818D3}" type="datetime1">
-              <a:t>27/12/25</a:t>
+              <a:t>19/5/26</a:t>
             </a:fld>
             <a:endParaRPr lang="en-VN"/>
           </a:p>
@@ -1024,7 +1026,7 @@
           <a:lstStyle/>
           <a:p>
             <a:fld id="{C7AFA920-85BE-4747-816A-47AD76A510FA}" type="datetime1">
-              <a:t>27/12/25</a:t>
+              <a:t>19/5/26</a:t>
             </a:fld>
             <a:endParaRPr lang="en-VN"/>
           </a:p>
@@ -1222,7 +1224,7 @@
           <a:lstStyle/>
           <a:p>
             <a:fld id="{AAD3D96D-7531-BC47-A011-B5D6B3D43310}" type="datetime1">
-              <a:t>27/12/25</a:t>
+              <a:t>19/5/26</a:t>
             </a:fld>
             <a:endParaRPr lang="en-VN"/>
           </a:p>
@@ -1532,7 +1534,7 @@
           <a:lstStyle/>
           <a:p>
             <a:fld id="{9099FF25-CCF5-1749-B789-DEA9DF3915D1}" type="datetime1">
-              <a:t>27/12/25</a:t>
+              <a:t>19/5/26</a:t>
             </a:fld>
             <a:endParaRPr lang="en-VN"/>
           </a:p>
@@ -1798,7 +1800,7 @@
           <a:lstStyle/>
           <a:p>
             <a:fld id="{96C9BD3F-C60C-8F40-A1AA-746E79F526C8}" type="datetime1">
-              <a:t>27/12/25</a:t>
+              <a:t>19/5/26</a:t>
             </a:fld>
             <a:endParaRPr lang="en-VN"/>
           </a:p>
@@ -2211,7 +2213,7 @@
           <a:lstStyle/>
           <a:p>
             <a:fld id="{A8563D55-6338-8241-BEA3-C8267015B326}" type="datetime1">
-              <a:t>27/12/25</a:t>
+              <a:t>19/5/26</a:t>
             </a:fld>
             <a:endParaRPr lang="en-VN"/>
           </a:p>
@@ -2351,7 +2353,7 @@
           <a:lstStyle/>
           <a:p>
             <a:fld id="{89782EF4-4D34-8E49-9BB8-7FCD8F64F56C}" type="datetime1">
-              <a:t>27/12/25</a:t>
+              <a:t>19/5/26</a:t>
             </a:fld>
             <a:endParaRPr lang="en-VN"/>
           </a:p>
@@ -2462,7 +2464,7 @@
           <a:lstStyle/>
           <a:p>
             <a:fld id="{8A835D4F-1253-B847-8798-F89DBC53ECA3}" type="datetime1">
-              <a:t>27/12/25</a:t>
+              <a:t>19/5/26</a:t>
             </a:fld>
             <a:endParaRPr lang="en-VN"/>
           </a:p>
@@ -2773,7 +2775,7 @@
           <a:lstStyle/>
           <a:p>
             <a:fld id="{7B60E56D-C72A-354F-B0FC-65EC27F745C6}" type="datetime1">
-              <a:t>27/12/25</a:t>
+              <a:t>19/5/26</a:t>
             </a:fld>
             <a:endParaRPr lang="en-VN"/>
           </a:p>
@@ -3060,7 +3062,7 @@
           <a:lstStyle/>
           <a:p>
             <a:fld id="{D4EEE616-05B3-E949-A580-BAD4E917BCA4}" type="datetime1">
-              <a:t>27/12/25</a:t>
+              <a:t>19/5/26</a:t>
             </a:fld>
             <a:endParaRPr lang="en-VN"/>
           </a:p>
@@ -3301,7 +3303,7 @@
           </a:lstStyle>
           <a:p>
             <a:fld id="{D2508FC7-06EA-184C-B437-1FD4117B159D}" type="datetime1">
-              <a:t>27/12/25</a:t>
+              <a:t>19/5/26</a:t>
             </a:fld>
             <a:endParaRPr lang="en-VN"/>
           </a:p>
@@ -3806,6 +3808,153 @@
     <p:extLst>
       <p:ext uri="{BB962C8B-B14F-4D97-AF65-F5344CB8AC3E}">
         <p14:creationId xmlns:p14="http://schemas.microsoft.com/office/powerpoint/2010/main" val="1977803310"/>
+      </p:ext>
+    </p:extLst>
+  </p:cSld>
+  <p:clrMapOvr>
+    <a:masterClrMapping/>
+  </p:clrMapOvr>
+</p:sld>
+</file>
+
+<file path=ppt/slides/slide10.xml><?xml version="1.0" encoding="utf-8"?>
+<p:sld xmlns:a="http://schemas.openxmlformats.org/drawingml/2006/main" xmlns:r="http://schemas.openxmlformats.org/officeDocument/2006/relationships" xmlns:p="http://schemas.openxmlformats.org/presentationml/2006/main">
+  <p:cSld>
+    <p:spTree>
+      <p:nvGrpSpPr>
+        <p:cNvPr id="1" name=""/>
+        <p:cNvGrpSpPr/>
+        <p:nvPr/>
+      </p:nvGrpSpPr>
+      <p:grpSpPr>
+        <a:xfrm>
+          <a:off x="0" y="0"/>
+          <a:ext cx="0" cy="0"/>
+          <a:chOff x="0" y="0"/>
+          <a:chExt cx="0" cy="0"/>
+        </a:xfrm>
+      </p:grpSpPr>
+      <p:sp>
+        <p:nvSpPr>
+          <p:cNvPr id="2" name="Title 1">
+            <a:extLst>
+              <a:ext uri="{FF2B5EF4-FFF2-40B4-BE49-F238E27FC236}">
+                <a16:creationId xmlns:a16="http://schemas.microsoft.com/office/drawing/2014/main" id="{10010F8F-400D-6655-6836-84D01E241849}"/>
+              </a:ext>
+            </a:extLst>
+          </p:cNvPr>
+          <p:cNvSpPr>
+            <a:spLocks noGrp="1"/>
+          </p:cNvSpPr>
+          <p:nvPr>
+            <p:ph type="title"/>
+          </p:nvPr>
+        </p:nvSpPr>
+        <p:spPr/>
+        <p:txBody>
+          <a:bodyPr/>
+          <a:lstStyle/>
+          <a:p>
+            <a:endParaRPr lang="en-VN"/>
+          </a:p>
+        </p:txBody>
+      </p:sp>
+      <p:sp>
+        <p:nvSpPr>
+          <p:cNvPr id="4" name="Slide Number Placeholder 3">
+            <a:extLst>
+              <a:ext uri="{FF2B5EF4-FFF2-40B4-BE49-F238E27FC236}">
+                <a16:creationId xmlns:a16="http://schemas.microsoft.com/office/drawing/2014/main" id="{405B98DB-9511-DF0C-E012-CD58779E3418}"/>
+              </a:ext>
+            </a:extLst>
+          </p:cNvPr>
+          <p:cNvSpPr>
+            <a:spLocks noGrp="1"/>
+          </p:cNvSpPr>
+          <p:nvPr>
+            <p:ph type="sldNum" sz="quarter" idx="12"/>
+          </p:nvPr>
+        </p:nvSpPr>
+        <p:spPr/>
+        <p:txBody>
+          <a:bodyPr/>
+          <a:lstStyle/>
+          <a:p>
+            <a:fld id="{8D5B5E1E-6446-E346-A8EF-B18E81FAF44B}" type="slidenum">
+              <a:rPr lang="en-VN"/>
+              <a:t>10</a:t>
+            </a:fld>
+            <a:endParaRPr lang="en-VN"/>
+          </a:p>
+        </p:txBody>
+      </p:sp>
+      <p:pic>
+        <p:nvPicPr>
+          <p:cNvPr id="8" name="Picture 7" descr="A screenshot of a test&#10;&#10;AI-generated content may be incorrect.">
+            <a:extLst>
+              <a:ext uri="{FF2B5EF4-FFF2-40B4-BE49-F238E27FC236}">
+                <a16:creationId xmlns:a16="http://schemas.microsoft.com/office/drawing/2014/main" id="{81907084-A570-E6A9-9353-792689A8E703}"/>
+              </a:ext>
+            </a:extLst>
+          </p:cNvPr>
+          <p:cNvPicPr>
+            <a:picLocks noChangeAspect="1"/>
+          </p:cNvPicPr>
+          <p:nvPr/>
+        </p:nvPicPr>
+        <p:blipFill>
+          <a:blip r:embed="rId2"/>
+          <a:stretch>
+            <a:fillRect/>
+          </a:stretch>
+        </p:blipFill>
+        <p:spPr>
+          <a:xfrm>
+            <a:off x="5753742" y="0"/>
+            <a:ext cx="6589354" cy="6356350"/>
+          </a:xfrm>
+          <a:prstGeom prst="rect">
+            <a:avLst/>
+          </a:prstGeom>
+        </p:spPr>
+      </p:pic>
+      <p:pic>
+        <p:nvPicPr>
+          <p:cNvPr id="6" name="Content Placeholder 5" descr="A screenshot of a paper&#10;&#10;AI-generated content may be incorrect.">
+            <a:extLst>
+              <a:ext uri="{FF2B5EF4-FFF2-40B4-BE49-F238E27FC236}">
+                <a16:creationId xmlns:a16="http://schemas.microsoft.com/office/drawing/2014/main" id="{DF2419E2-032D-8E3C-D224-80EE54C69B35}"/>
+              </a:ext>
+            </a:extLst>
+          </p:cNvPr>
+          <p:cNvPicPr>
+            <a:picLocks noGrp="1" noChangeAspect="1"/>
+          </p:cNvPicPr>
+          <p:nvPr>
+            <p:ph idx="1"/>
+          </p:nvPr>
+        </p:nvPicPr>
+        <p:blipFill>
+          <a:blip r:embed="rId3"/>
+          <a:srcRect r="3291"/>
+          <a:stretch>
+            <a:fillRect/>
+          </a:stretch>
+        </p:blipFill>
+        <p:spPr>
+          <a:xfrm>
+            <a:off x="1" y="0"/>
+            <a:ext cx="5854700" cy="5651500"/>
+          </a:xfrm>
+          <a:prstGeom prst="rect">
+            <a:avLst/>
+          </a:prstGeom>
+        </p:spPr>
+      </p:pic>
+    </p:spTree>
+    <p:extLst>
+      <p:ext uri="{BB962C8B-B14F-4D97-AF65-F5344CB8AC3E}">
+        <p14:creationId xmlns:p14="http://schemas.microsoft.com/office/powerpoint/2010/main" val="4284949965"/>
       </p:ext>
     </p:extLst>
   </p:cSld>
@@ -15555,6 +15704,126 @@
 </p:sld>
 </file>
 
+<file path=ppt/slides/slide9.xml><?xml version="1.0" encoding="utf-8"?>
+<p:sld xmlns:a="http://schemas.openxmlformats.org/drawingml/2006/main" xmlns:r="http://schemas.openxmlformats.org/officeDocument/2006/relationships" xmlns:p="http://schemas.openxmlformats.org/presentationml/2006/main">
+  <p:cSld>
+    <p:spTree>
+      <p:nvGrpSpPr>
+        <p:cNvPr id="1" name=""/>
+        <p:cNvGrpSpPr/>
+        <p:nvPr/>
+      </p:nvGrpSpPr>
+      <p:grpSpPr>
+        <a:xfrm>
+          <a:off x="0" y="0"/>
+          <a:ext cx="0" cy="0"/>
+          <a:chOff x="0" y="0"/>
+          <a:chExt cx="0" cy="0"/>
+        </a:xfrm>
+      </p:grpSpPr>
+      <p:sp>
+        <p:nvSpPr>
+          <p:cNvPr id="4" name="Slide Number Placeholder 3">
+            <a:extLst>
+              <a:ext uri="{FF2B5EF4-FFF2-40B4-BE49-F238E27FC236}">
+                <a16:creationId xmlns:a16="http://schemas.microsoft.com/office/drawing/2014/main" id="{00A18546-A35D-0AAC-FCB8-7442DC6D5924}"/>
+              </a:ext>
+            </a:extLst>
+          </p:cNvPr>
+          <p:cNvSpPr>
+            <a:spLocks noGrp="1"/>
+          </p:cNvSpPr>
+          <p:nvPr>
+            <p:ph type="sldNum" sz="quarter" idx="12"/>
+          </p:nvPr>
+        </p:nvSpPr>
+        <p:spPr/>
+        <p:txBody>
+          <a:bodyPr/>
+          <a:lstStyle/>
+          <a:p>
+            <a:fld id="{8D5B5E1E-6446-E346-A8EF-B18E81FAF44B}" type="slidenum">
+              <a:rPr lang="en-VN"/>
+              <a:t>9</a:t>
+            </a:fld>
+            <a:endParaRPr lang="en-VN"/>
+          </a:p>
+        </p:txBody>
+      </p:sp>
+      <p:pic>
+        <p:nvPicPr>
+          <p:cNvPr id="6" name="Picture 5" descr="A close up of a text&#10;&#10;AI-generated content may be incorrect.">
+            <a:extLst>
+              <a:ext uri="{FF2B5EF4-FFF2-40B4-BE49-F238E27FC236}">
+                <a16:creationId xmlns:a16="http://schemas.microsoft.com/office/drawing/2014/main" id="{99BDCF1E-ABC8-E6A0-8EA2-55119C294573}"/>
+              </a:ext>
+            </a:extLst>
+          </p:cNvPr>
+          <p:cNvPicPr>
+            <a:picLocks noChangeAspect="1"/>
+          </p:cNvPicPr>
+          <p:nvPr/>
+        </p:nvPicPr>
+        <p:blipFill>
+          <a:blip r:embed="rId2"/>
+          <a:stretch>
+            <a:fillRect/>
+          </a:stretch>
+        </p:blipFill>
+        <p:spPr>
+          <a:xfrm>
+            <a:off x="-50800" y="0"/>
+            <a:ext cx="6184900" cy="4493478"/>
+          </a:xfrm>
+          <a:prstGeom prst="rect">
+            <a:avLst/>
+          </a:prstGeom>
+        </p:spPr>
+      </p:pic>
+      <p:pic>
+        <p:nvPicPr>
+          <p:cNvPr id="8" name="Picture 7" descr="A paper with text and numbers&#10;&#10;AI-generated content may be incorrect.">
+            <a:extLst>
+              <a:ext uri="{FF2B5EF4-FFF2-40B4-BE49-F238E27FC236}">
+                <a16:creationId xmlns:a16="http://schemas.microsoft.com/office/drawing/2014/main" id="{62A23E21-BC69-1393-E79F-DC0D34564488}"/>
+              </a:ext>
+            </a:extLst>
+          </p:cNvPr>
+          <p:cNvPicPr>
+            <a:picLocks noChangeAspect="1"/>
+          </p:cNvPicPr>
+          <p:nvPr/>
+        </p:nvPicPr>
+        <p:blipFill>
+          <a:blip r:embed="rId3"/>
+          <a:srcRect l="5130"/>
+          <a:stretch>
+            <a:fillRect/>
+          </a:stretch>
+        </p:blipFill>
+        <p:spPr>
+          <a:xfrm>
+            <a:off x="6134100" y="-1"/>
+            <a:ext cx="6057900" cy="5901567"/>
+          </a:xfrm>
+          <a:prstGeom prst="rect">
+            <a:avLst/>
+          </a:prstGeom>
+        </p:spPr>
+      </p:pic>
+    </p:spTree>
+    <p:extLst>
+      <p:ext uri="{BB962C8B-B14F-4D97-AF65-F5344CB8AC3E}">
+        <p14:creationId xmlns:p14="http://schemas.microsoft.com/office/powerpoint/2010/main" val="4276414156"/>
+      </p:ext>
+    </p:extLst>
+  </p:cSld>
+  <p:clrMapOvr>
+    <a:masterClrMapping/>
+  </p:clrMapOvr>
+</p:sld>
+</file>
+
 <file path=ppt/theme/theme1.xml><?xml version="1.0" encoding="utf-8"?>
 <a:theme xmlns:a="http://schemas.openxmlformats.org/drawingml/2006/main" name="Office Theme">
   <a:themeElements>
